--- a/2024/2024-01-26-Mixtral-On-Laptop.pptx
+++ b/2024/2024-01-26-Mixtral-On-Laptop.pptx
@@ -262,6 +262,11 @@
       </a:defRPr>
     </a:lvl9pPr>
   </p:defaultTextStyle>
+  <p:extLst>
+    <p:ext uri="{EFAFB233-063F-42B5-8137-9DF3F51BA10A}">
+      <p15:sldGuideLst xmlns:p15="http://schemas.microsoft.com/office/powerpoint/2012/main"/>
+    </p:ext>
+  </p:extLst>
 </p:presentation>
 </file>
 
@@ -2417,7 +2422,7 @@
         </p:nvSpPr>
         <p:spPr>
           <a:xfrm>
-            <a:off x="381300" y="685800"/>
+            <a:off x="381000" y="685800"/>
             <a:ext cx="6096000" cy="3429000"/>
           </a:xfrm>
           <a:custGeom>
@@ -17233,7 +17238,7 @@
         <p:spPr>
           <a:xfrm>
             <a:off x="2155050" y="3991450"/>
-            <a:ext cx="4833900" cy="585000"/>
+            <a:ext cx="4833900" cy="784800"/>
           </a:xfrm>
           <a:prstGeom prst="rect">
             <a:avLst/>
@@ -17267,7 +17272,7 @@
               <a:buNone/>
             </a:pPr>
             <a:r>
-              <a:rPr lang="en" sz="1300">
+              <a:rPr lang="en" sz="1300" dirty="0">
                 <a:solidFill>
                   <a:srgbClr val="0F0F0F"/>
                 </a:solidFill>
@@ -17279,7 +17284,7 @@
               <a:t>In LLMs, quantization reduces parameter precision to save memory and speed up inference, but it might lower accuracy</a:t>
             </a:r>
             <a:r>
-              <a:rPr lang="en" sz="1300">
+              <a:rPr lang="en" sz="1300" dirty="0">
                 <a:solidFill>
                   <a:schemeClr val="dk2"/>
                 </a:solidFill>
@@ -17290,7 +17295,67 @@
               </a:rPr>
               <a:t>.</a:t>
             </a:r>
-            <a:endParaRPr sz="1300">
+            <a:endParaRPr lang="en" sz="1300" dirty="0">
+              <a:solidFill>
+                <a:schemeClr val="dk2"/>
+              </a:solidFill>
+              <a:latin typeface="Calibri"/>
+              <a:ea typeface="Calibri"/>
+              <a:cs typeface="Calibri"/>
+              <a:sym typeface="Calibri"/>
+              <a:hlinkClick r:id="rId5"/>
+            </a:endParaRPr>
+          </a:p>
+          <a:p>
+            <a:pPr marL="0" lvl="0" indent="0" algn="l" rtl="0">
+              <a:spcBef>
+                <a:spcPts val="0"/>
+              </a:spcBef>
+              <a:spcAft>
+                <a:spcPts val="0"/>
+              </a:spcAft>
+              <a:buNone/>
+            </a:pPr>
+            <a:r>
+              <a:rPr lang="en-US" sz="1300" dirty="0">
+                <a:solidFill>
+                  <a:srgbClr val="0F0F0F"/>
+                </a:solidFill>
+                <a:latin typeface="Calibri"/>
+                <a:ea typeface="Calibri"/>
+                <a:cs typeface="Calibri"/>
+                <a:sym typeface="Calibri"/>
+                <a:hlinkClick r:id="rId5"/>
+              </a:rPr>
+              <a:t>https://</a:t>
+            </a:r>
+            <a:r>
+              <a:rPr lang="en-US" sz="1300" dirty="0" err="1">
+                <a:solidFill>
+                  <a:srgbClr val="0F0F0F"/>
+                </a:solidFill>
+                <a:latin typeface="Calibri"/>
+                <a:ea typeface="Calibri"/>
+                <a:cs typeface="Calibri"/>
+                <a:sym typeface="Calibri"/>
+                <a:hlinkClick r:id="rId5"/>
+              </a:rPr>
+              <a:t>arxiv.org</a:t>
+            </a:r>
+            <a:r>
+              <a:rPr lang="en-US" sz="1300" dirty="0">
+                <a:solidFill>
+                  <a:srgbClr val="0F0F0F"/>
+                </a:solidFill>
+                <a:latin typeface="Calibri"/>
+                <a:ea typeface="Calibri"/>
+                <a:cs typeface="Calibri"/>
+                <a:sym typeface="Calibri"/>
+                <a:hlinkClick r:id="rId5"/>
+              </a:rPr>
+              <a:t>/pdf/2212.09720.pdf</a:t>
+            </a:r>
+            <a:endParaRPr sz="1300" dirty="0">
               <a:solidFill>
                 <a:srgbClr val="0F0F0F"/>
               </a:solidFill>
